--- a/Slide Deck/Madera Transit Analysis.pptx
+++ b/Slide Deck/Madera Transit Analysis.pptx
@@ -117,6 +117,11 @@
       </a:defRPr>
     </a:lvl9pPr>
   </p:defaultTextStyle>
+  <p:extLst>
+    <p:ext uri="{EFAFB233-063F-42B5-8137-9DF3F51BA10A}">
+      <p15:sldGuideLst xmlns:p15="http://schemas.microsoft.com/office/powerpoint/2012/main"/>
+    </p:ext>
+  </p:extLst>
 </p:presentation>
 </file>
 
@@ -362,7 +367,7 @@
           <a:p>
             <a:fld id="{766B0C42-5065-4BF6-B693-914B09332802}" type="datetimeFigureOut">
               <a:rPr lang="en-US" smtClean="0"/>
-              <a:t>6/6/2026</a:t>
+              <a:t>6/7/2026</a:t>
             </a:fld>
             <a:endParaRPr lang="en-US"/>
           </a:p>
@@ -570,7 +575,7 @@
           <a:p>
             <a:fld id="{766B0C42-5065-4BF6-B693-914B09332802}" type="datetimeFigureOut">
               <a:rPr lang="en-US" smtClean="0"/>
-              <a:t>6/6/2026</a:t>
+              <a:t>6/7/2026</a:t>
             </a:fld>
             <a:endParaRPr lang="en-US"/>
           </a:p>
@@ -842,7 +847,7 @@
           <a:p>
             <a:fld id="{766B0C42-5065-4BF6-B693-914B09332802}" type="datetimeFigureOut">
               <a:rPr lang="en-US" smtClean="0"/>
-              <a:t>6/6/2026</a:t>
+              <a:t>6/7/2026</a:t>
             </a:fld>
             <a:endParaRPr lang="en-US"/>
           </a:p>
@@ -1012,7 +1017,7 @@
           <a:p>
             <a:fld id="{766B0C42-5065-4BF6-B693-914B09332802}" type="datetimeFigureOut">
               <a:rPr lang="en-US" smtClean="0"/>
-              <a:t>6/6/2026</a:t>
+              <a:t>6/7/2026</a:t>
             </a:fld>
             <a:endParaRPr lang="en-US"/>
           </a:p>
@@ -1363,7 +1368,7 @@
           <a:p>
             <a:fld id="{766B0C42-5065-4BF6-B693-914B09332802}" type="datetimeFigureOut">
               <a:rPr lang="en-US" smtClean="0"/>
-              <a:t>6/6/2026</a:t>
+              <a:t>6/7/2026</a:t>
             </a:fld>
             <a:endParaRPr lang="en-US"/>
           </a:p>
@@ -1638,7 +1643,7 @@
           <a:p>
             <a:fld id="{766B0C42-5065-4BF6-B693-914B09332802}" type="datetimeFigureOut">
               <a:rPr lang="en-US" smtClean="0"/>
-              <a:t>6/6/2026</a:t>
+              <a:t>6/7/2026</a:t>
             </a:fld>
             <a:endParaRPr lang="en-US"/>
           </a:p>
@@ -2017,7 +2022,7 @@
           <a:p>
             <a:fld id="{766B0C42-5065-4BF6-B693-914B09332802}" type="datetimeFigureOut">
               <a:rPr lang="en-US" smtClean="0"/>
-              <a:t>6/6/2026</a:t>
+              <a:t>6/7/2026</a:t>
             </a:fld>
             <a:endParaRPr lang="en-US"/>
           </a:p>
@@ -2135,7 +2140,7 @@
           <a:p>
             <a:fld id="{766B0C42-5065-4BF6-B693-914B09332802}" type="datetimeFigureOut">
               <a:rPr lang="en-US" smtClean="0"/>
-              <a:t>6/6/2026</a:t>
+              <a:t>6/7/2026</a:t>
             </a:fld>
             <a:endParaRPr lang="en-US"/>
           </a:p>
@@ -2322,7 +2327,7 @@
           <a:p>
             <a:fld id="{766B0C42-5065-4BF6-B693-914B09332802}" type="datetimeFigureOut">
               <a:rPr lang="en-US" smtClean="0"/>
-              <a:t>6/6/2026</a:t>
+              <a:t>6/7/2026</a:t>
             </a:fld>
             <a:endParaRPr lang="en-US"/>
           </a:p>
@@ -2692,7 +2697,7 @@
           <a:p>
             <a:fld id="{766B0C42-5065-4BF6-B693-914B09332802}" type="datetimeFigureOut">
               <a:rPr lang="en-US" smtClean="0"/>
-              <a:t>6/6/2026</a:t>
+              <a:t>6/7/2026</a:t>
             </a:fld>
             <a:endParaRPr lang="en-US"/>
           </a:p>
@@ -3085,7 +3090,7 @@
           <a:p>
             <a:fld id="{766B0C42-5065-4BF6-B693-914B09332802}" type="datetimeFigureOut">
               <a:rPr lang="en-US" smtClean="0"/>
-              <a:t>6/6/2026</a:t>
+              <a:t>6/7/2026</a:t>
             </a:fld>
             <a:endParaRPr lang="en-US"/>
           </a:p>
@@ -3388,7 +3393,7 @@
           <a:p>
             <a:fld id="{766B0C42-5065-4BF6-B693-914B09332802}" type="datetimeFigureOut">
               <a:rPr lang="en-US" smtClean="0"/>
-              <a:t>6/6/2026</a:t>
+              <a:t>6/7/2026</a:t>
             </a:fld>
             <a:endParaRPr lang="en-US"/>
           </a:p>
@@ -3974,7 +3979,7 @@
         <p:spPr/>
         <p:txBody>
           <a:bodyPr>
-            <a:normAutofit fontScale="85000" lnSpcReduction="20000"/>
+            <a:normAutofit/>
           </a:bodyPr>
           <a:lstStyle/>
           <a:p>
@@ -3987,13 +3992,6 @@
           <a:p>
             <a:pPr algn="ctr"/>
             <a:endParaRPr lang="en-US" dirty="0"/>
-          </a:p>
-          <a:p>
-            <a:pPr algn="ctr"/>
-            <a:r>
-              <a:rPr lang="en-US" dirty="0"/>
-              <a:t>GitHub Link:</a:t>
-            </a:r>
           </a:p>
         </p:txBody>
       </p:sp>

--- a/Slide Deck/Madera Transit Analysis.pptx
+++ b/Slide Deck/Madera Transit Analysis.pptx
@@ -367,7 +367,7 @@
           <a:p>
             <a:fld id="{766B0C42-5065-4BF6-B693-914B09332802}" type="datetimeFigureOut">
               <a:rPr lang="en-US" smtClean="0"/>
-              <a:t>6/7/2026</a:t>
+              <a:t>6/21/2026</a:t>
             </a:fld>
             <a:endParaRPr lang="en-US"/>
           </a:p>
@@ -575,7 +575,7 @@
           <a:p>
             <a:fld id="{766B0C42-5065-4BF6-B693-914B09332802}" type="datetimeFigureOut">
               <a:rPr lang="en-US" smtClean="0"/>
-              <a:t>6/7/2026</a:t>
+              <a:t>6/21/2026</a:t>
             </a:fld>
             <a:endParaRPr lang="en-US"/>
           </a:p>
@@ -847,7 +847,7 @@
           <a:p>
             <a:fld id="{766B0C42-5065-4BF6-B693-914B09332802}" type="datetimeFigureOut">
               <a:rPr lang="en-US" smtClean="0"/>
-              <a:t>6/7/2026</a:t>
+              <a:t>6/21/2026</a:t>
             </a:fld>
             <a:endParaRPr lang="en-US"/>
           </a:p>
@@ -1017,7 +1017,7 @@
           <a:p>
             <a:fld id="{766B0C42-5065-4BF6-B693-914B09332802}" type="datetimeFigureOut">
               <a:rPr lang="en-US" smtClean="0"/>
-              <a:t>6/7/2026</a:t>
+              <a:t>6/21/2026</a:t>
             </a:fld>
             <a:endParaRPr lang="en-US"/>
           </a:p>
@@ -1368,7 +1368,7 @@
           <a:p>
             <a:fld id="{766B0C42-5065-4BF6-B693-914B09332802}" type="datetimeFigureOut">
               <a:rPr lang="en-US" smtClean="0"/>
-              <a:t>6/7/2026</a:t>
+              <a:t>6/21/2026</a:t>
             </a:fld>
             <a:endParaRPr lang="en-US"/>
           </a:p>
@@ -1643,7 +1643,7 @@
           <a:p>
             <a:fld id="{766B0C42-5065-4BF6-B693-914B09332802}" type="datetimeFigureOut">
               <a:rPr lang="en-US" smtClean="0"/>
-              <a:t>6/7/2026</a:t>
+              <a:t>6/21/2026</a:t>
             </a:fld>
             <a:endParaRPr lang="en-US"/>
           </a:p>
@@ -2022,7 +2022,7 @@
           <a:p>
             <a:fld id="{766B0C42-5065-4BF6-B693-914B09332802}" type="datetimeFigureOut">
               <a:rPr lang="en-US" smtClean="0"/>
-              <a:t>6/7/2026</a:t>
+              <a:t>6/21/2026</a:t>
             </a:fld>
             <a:endParaRPr lang="en-US"/>
           </a:p>
@@ -2140,7 +2140,7 @@
           <a:p>
             <a:fld id="{766B0C42-5065-4BF6-B693-914B09332802}" type="datetimeFigureOut">
               <a:rPr lang="en-US" smtClean="0"/>
-              <a:t>6/7/2026</a:t>
+              <a:t>6/21/2026</a:t>
             </a:fld>
             <a:endParaRPr lang="en-US"/>
           </a:p>
@@ -2327,7 +2327,7 @@
           <a:p>
             <a:fld id="{766B0C42-5065-4BF6-B693-914B09332802}" type="datetimeFigureOut">
               <a:rPr lang="en-US" smtClean="0"/>
-              <a:t>6/7/2026</a:t>
+              <a:t>6/21/2026</a:t>
             </a:fld>
             <a:endParaRPr lang="en-US"/>
           </a:p>
@@ -2697,7 +2697,7 @@
           <a:p>
             <a:fld id="{766B0C42-5065-4BF6-B693-914B09332802}" type="datetimeFigureOut">
               <a:rPr lang="en-US" smtClean="0"/>
-              <a:t>6/7/2026</a:t>
+              <a:t>6/21/2026</a:t>
             </a:fld>
             <a:endParaRPr lang="en-US"/>
           </a:p>
@@ -3090,7 +3090,7 @@
           <a:p>
             <a:fld id="{766B0C42-5065-4BF6-B693-914B09332802}" type="datetimeFigureOut">
               <a:rPr lang="en-US" smtClean="0"/>
-              <a:t>6/7/2026</a:t>
+              <a:t>6/21/2026</a:t>
             </a:fld>
             <a:endParaRPr lang="en-US"/>
           </a:p>
@@ -3393,7 +3393,7 @@
           <a:p>
             <a:fld id="{766B0C42-5065-4BF6-B693-914B09332802}" type="datetimeFigureOut">
               <a:rPr lang="en-US" smtClean="0"/>
-              <a:t>6/7/2026</a:t>
+              <a:t>6/21/2026</a:t>
             </a:fld>
             <a:endParaRPr lang="en-US"/>
           </a:p>
@@ -4471,7 +4471,15 @@
           <a:p>
             <a:r>
               <a:rPr lang="en-US" dirty="0"/>
-              <a:t>The city is currently exploring micro-transit as an alternative to DR and potentially FR, while it can work especially for smaller communities, I worry that pursuing more low-density transit can hamstring the city. </a:t>
+              <a:t>The city is currently exploring micro-transit as an alternative to DR and potentially FR, while it can </a:t>
+            </a:r>
+            <a:r>
+              <a:rPr lang="en-US"/>
+              <a:t>work well </a:t>
+            </a:r>
+            <a:r>
+              <a:rPr lang="en-US" dirty="0"/>
+              <a:t>for smaller communities, I worry that pursuing more low-density transit can hamstring the city. </a:t>
             </a:r>
           </a:p>
           <a:p>

--- a/Slide Deck/Madera Transit Analysis.pptx
+++ b/Slide Deck/Madera Transit Analysis.pptx
@@ -4471,21 +4471,21 @@
           <a:p>
             <a:r>
               <a:rPr lang="en-US" dirty="0"/>
-              <a:t>The city is currently exploring micro-transit as an alternative to DR and potentially FR, while it can </a:t>
+              <a:t>The city is currently exploring micro-transit as an alternative to DR and potentially FR, while it can work well for smaller communities, I worry that pursuing more low-density transit can hamstring the city. </a:t>
+            </a:r>
+          </a:p>
+          <a:p>
+            <a:r>
+              <a:rPr lang="en-US" dirty="0"/>
+              <a:t>With legislation </a:t>
             </a:r>
             <a:r>
               <a:rPr lang="en-US"/>
-              <a:t>work well </a:t>
+              <a:t>like AB-2011 </a:t>
             </a:r>
             <a:r>
               <a:rPr lang="en-US" dirty="0"/>
-              <a:t>for smaller communities, I worry that pursuing more low-density transit can hamstring the city. </a:t>
-            </a:r>
-          </a:p>
-          <a:p>
-            <a:r>
-              <a:rPr lang="en-US" dirty="0"/>
-              <a:t>With legislation like SB-79 and AB-2011 passing, Madera has a golden opportunity to prepare for HSR and the economic opportunities it will bring.</a:t>
+              <a:t>passing, Madera has a golden opportunity to prepare for HSR and the economic opportunities it will bring.</a:t>
             </a:r>
           </a:p>
           <a:p>

--- a/Slide Deck/Madera Transit Analysis.pptx
+++ b/Slide Deck/Madera Transit Analysis.pptx
@@ -4459,13 +4459,13 @@
         <p:spPr/>
         <p:txBody>
           <a:bodyPr>
-            <a:normAutofit fontScale="92500" lnSpcReduction="10000"/>
+            <a:normAutofit fontScale="92500" lnSpcReduction="20000"/>
           </a:bodyPr>
           <a:lstStyle/>
           <a:p>
             <a:r>
               <a:rPr lang="en-US" dirty="0"/>
-              <a:t>After analyzing the data, I feel the biggest concern with Madera’s transit system is its readiness as a High-Speed Rail feeder. Now is the time to address infrastructure issues and position Madera as a high-frequency transit ready city. However, with the hourly bus service and negligible farebox recovery there is real work to be done.</a:t>
+              <a:t>After analyzing the data, I feel the biggest concern with Madera’s transit system is its impracticality as a meaningful alternative to personal vehicles. I believe it is time to explore addressing infrastructure gaps with higher-frequency service in mind. However, with the hourly bus service and negligible farebox recovery there is real work to be done.</a:t>
             </a:r>
           </a:p>
           <a:p>
@@ -4477,21 +4477,13 @@
           <a:p>
             <a:r>
               <a:rPr lang="en-US" dirty="0"/>
-              <a:t>With legislation </a:t>
-            </a:r>
-            <a:r>
-              <a:rPr lang="en-US"/>
-              <a:t>like AB-2011 </a:t>
-            </a:r>
+              <a:t>With the future of the Bay Area and Los Angeles connections of California’s HSR in flux, banking on its associated benefits may spread the City’s resources thin. With that said, Madera should still take steps to explore service improvements to take advantage of inter-city travel within the Central Valley.</a:t>
+            </a:r>
+          </a:p>
+          <a:p>
             <a:r>
               <a:rPr lang="en-US" dirty="0"/>
-              <a:t>passing, Madera has a golden opportunity to prepare for HSR and the economic opportunities it will bring.</a:t>
-            </a:r>
-          </a:p>
-          <a:p>
-            <a:r>
-              <a:rPr lang="en-US" dirty="0"/>
-              <a:t>I’d recommend the city explore implementing pilot programs for higher frequency schedules in major corridors and gauging the viability of microtransit replacing the current DR Dial-A-Ride service.</a:t>
+              <a:t>I’d recommend the City explore implementing pilot programs for higher frequency schedules in major corridors and gauging the viability of microtransit replacing the current DR Dial-A-Ride service.</a:t>
             </a:r>
           </a:p>
           <a:p>

--- a/Slide Deck/Madera Transit Analysis.pptx
+++ b/Slide Deck/Madera Transit Analysis.pptx
@@ -367,7 +367,7 @@
           <a:p>
             <a:fld id="{766B0C42-5065-4BF6-B693-914B09332802}" type="datetimeFigureOut">
               <a:rPr lang="en-US" smtClean="0"/>
-              <a:t>6/21/2026</a:t>
+              <a:t>7/12/2026</a:t>
             </a:fld>
             <a:endParaRPr lang="en-US"/>
           </a:p>
@@ -575,7 +575,7 @@
           <a:p>
             <a:fld id="{766B0C42-5065-4BF6-B693-914B09332802}" type="datetimeFigureOut">
               <a:rPr lang="en-US" smtClean="0"/>
-              <a:t>6/21/2026</a:t>
+              <a:t>7/12/2026</a:t>
             </a:fld>
             <a:endParaRPr lang="en-US"/>
           </a:p>
@@ -847,7 +847,7 @@
           <a:p>
             <a:fld id="{766B0C42-5065-4BF6-B693-914B09332802}" type="datetimeFigureOut">
               <a:rPr lang="en-US" smtClean="0"/>
-              <a:t>6/21/2026</a:t>
+              <a:t>7/12/2026</a:t>
             </a:fld>
             <a:endParaRPr lang="en-US"/>
           </a:p>
@@ -1017,7 +1017,7 @@
           <a:p>
             <a:fld id="{766B0C42-5065-4BF6-B693-914B09332802}" type="datetimeFigureOut">
               <a:rPr lang="en-US" smtClean="0"/>
-              <a:t>6/21/2026</a:t>
+              <a:t>7/12/2026</a:t>
             </a:fld>
             <a:endParaRPr lang="en-US"/>
           </a:p>
@@ -1368,7 +1368,7 @@
           <a:p>
             <a:fld id="{766B0C42-5065-4BF6-B693-914B09332802}" type="datetimeFigureOut">
               <a:rPr lang="en-US" smtClean="0"/>
-              <a:t>6/21/2026</a:t>
+              <a:t>7/12/2026</a:t>
             </a:fld>
             <a:endParaRPr lang="en-US"/>
           </a:p>
@@ -1643,7 +1643,7 @@
           <a:p>
             <a:fld id="{766B0C42-5065-4BF6-B693-914B09332802}" type="datetimeFigureOut">
               <a:rPr lang="en-US" smtClean="0"/>
-              <a:t>6/21/2026</a:t>
+              <a:t>7/12/2026</a:t>
             </a:fld>
             <a:endParaRPr lang="en-US"/>
           </a:p>
@@ -2022,7 +2022,7 @@
           <a:p>
             <a:fld id="{766B0C42-5065-4BF6-B693-914B09332802}" type="datetimeFigureOut">
               <a:rPr lang="en-US" smtClean="0"/>
-              <a:t>6/21/2026</a:t>
+              <a:t>7/12/2026</a:t>
             </a:fld>
             <a:endParaRPr lang="en-US"/>
           </a:p>
@@ -2140,7 +2140,7 @@
           <a:p>
             <a:fld id="{766B0C42-5065-4BF6-B693-914B09332802}" type="datetimeFigureOut">
               <a:rPr lang="en-US" smtClean="0"/>
-              <a:t>6/21/2026</a:t>
+              <a:t>7/12/2026</a:t>
             </a:fld>
             <a:endParaRPr lang="en-US"/>
           </a:p>
@@ -2327,7 +2327,7 @@
           <a:p>
             <a:fld id="{766B0C42-5065-4BF6-B693-914B09332802}" type="datetimeFigureOut">
               <a:rPr lang="en-US" smtClean="0"/>
-              <a:t>6/21/2026</a:t>
+              <a:t>7/12/2026</a:t>
             </a:fld>
             <a:endParaRPr lang="en-US"/>
           </a:p>
@@ -2697,7 +2697,7 @@
           <a:p>
             <a:fld id="{766B0C42-5065-4BF6-B693-914B09332802}" type="datetimeFigureOut">
               <a:rPr lang="en-US" smtClean="0"/>
-              <a:t>6/21/2026</a:t>
+              <a:t>7/12/2026</a:t>
             </a:fld>
             <a:endParaRPr lang="en-US"/>
           </a:p>
@@ -3090,7 +3090,7 @@
           <a:p>
             <a:fld id="{766B0C42-5065-4BF6-B693-914B09332802}" type="datetimeFigureOut">
               <a:rPr lang="en-US" smtClean="0"/>
-              <a:t>6/21/2026</a:t>
+              <a:t>7/12/2026</a:t>
             </a:fld>
             <a:endParaRPr lang="en-US"/>
           </a:p>
@@ -3393,7 +3393,7 @@
           <a:p>
             <a:fld id="{766B0C42-5065-4BF6-B693-914B09332802}" type="datetimeFigureOut">
               <a:rPr lang="en-US" smtClean="0"/>
-              <a:t>6/21/2026</a:t>
+              <a:t>7/12/2026</a:t>
             </a:fld>
             <a:endParaRPr lang="en-US"/>
           </a:p>
@@ -4471,7 +4471,7 @@
           <a:p>
             <a:r>
               <a:rPr lang="en-US" dirty="0"/>
-              <a:t>The city is currently exploring micro-transit as an alternative to DR and potentially FR, while it can work well for smaller communities, I worry that pursuing more low-density transit can hamstring the city. </a:t>
+              <a:t>The City is currently exploring micro-transit as an alternative to DR and potentially FR, while it can work well for smaller communities. I worry that pursuing more low-density transit can hamstring future transit-oriented developments in the future. </a:t>
             </a:r>
           </a:p>
           <a:p>
@@ -4483,7 +4483,7 @@
           <a:p>
             <a:r>
               <a:rPr lang="en-US" dirty="0"/>
-              <a:t>I’d recommend the City explore implementing pilot programs for higher frequency schedules in major corridors and gauging the viability of microtransit replacing the current DR Dial-A-Ride service.</a:t>
+              <a:t>I’d recommend exploring the implementation of pilot programs for higher frequency schedules in major corridors and gauging the viability of microtransit replacing the current DR Dial-A-Ride service.</a:t>
             </a:r>
           </a:p>
           <a:p>

--- a/Slide Deck/Madera Transit Analysis.pptx
+++ b/Slide Deck/Madera Transit Analysis.pptx
@@ -4471,7 +4471,7 @@
           <a:p>
             <a:r>
               <a:rPr lang="en-US" dirty="0"/>
-              <a:t>The City is currently exploring micro-transit as an alternative to DR and potentially FR, while it can work well for smaller communities. I worry that pursuing more low-density transit can hamstring future transit-oriented developments in the future. </a:t>
+              <a:t>The City is currently exploring micro-transit as an alternative to DR and potentially FR, while it can work well for smaller communities. I worry that pursuing more low-density transit could hamstring transit-oriented developments in the future. </a:t>
             </a:r>
           </a:p>
           <a:p>
